--- a/launch/rs/design/deck-company/라라슈_회사소개서_v1.pptx
+++ b/launch/rs/design/deck-company/라라슈_회사소개서_v1.pptx
@@ -116,52 +116,52 @@
   <p:extLst>
     <p:ext uri="{521415D9-36F7-43E2-AB2F-B90AF26B5E84}">
       <p14:sectionLst xmlns:p14="http://schemas.microsoft.com/office/powerpoint/2010/main">
-        <p14:section name="표지" id="{f5341ad1-c0b0-24d4-9c98-e84528998a8f}">
+        <p14:section name="표지" id="{dcfb47ac-ae89-fc6d-00a9-cf1c14edcfcb}">
           <p14:sldIdLst>
             <p14:sldId id="256"/>
           </p14:sldIdLst>
         </p14:section>
-        <p14:section name="문제" id="{527b97b6-7e65-30df-77e4-d6ddbbf186ac}">
+        <p14:section name="문제" id="{e7e91962-f9b9-ecdd-3fc2-7a0cc1497a6c}">
           <p14:sldIdLst>
             <p14:sldId id="257"/>
           </p14:sldIdLst>
         </p14:section>
-        <p14:section name="브랜드" id="{2f6d9dd6-e9aa-bf03-a32f-1c81bb58ccac}">
+        <p14:section name="브랜드" id="{3442b1da-c0d8-7b17-ef20-8a0203f93d62}">
           <p14:sldIdLst>
             <p14:sldId id="258"/>
           </p14:sldIdLst>
         </p14:section>
-        <p14:section name="소재" id="{97215242-17c9-0df3-4f68-d28983684acc}">
+        <p14:section name="소재" id="{b0a6e920-e2b2-6dc6-463d-62410776cd3e}">
           <p14:sldIdLst>
             <p14:sldId id="259"/>
           </p14:sldIdLst>
         </p14:section>
-        <p14:section name="설계" id="{92dabb50-0090-335f-69f9-eb36bb4bfef3}">
+        <p14:section name="설계" id="{25b8ec01-9fb0-1556-c4a3-d1af5bf1a4b4}">
           <p14:sldIdLst>
             <p14:sldId id="260"/>
           </p14:sldIdLst>
         </p14:section>
-        <p14:section name="제품" id="{8f9b6c0f-d689-bc97-ac6d-ef5b2c7aee09}">
+        <p14:section name="제품" id="{484cf5dc-0144-bdaa-3aab-a29ad1a16a31}">
           <p14:sldIdLst>
             <p14:sldId id="261"/>
           </p14:sldIdLst>
         </p14:section>
-        <p14:section name="ESG" id="{924c4df5-b04b-cbb1-262f-03c743da6ecc}">
+        <p14:section name="ESG" id="{fc05ced6-a5aa-6f8e-3d1c-4af6295a9dc7}">
           <p14:sldIdLst>
             <p14:sldId id="262"/>
           </p14:sldIdLst>
         </p14:section>
-        <p14:section name="B2B" id="{7aa6823d-46af-d9f3-75f2-4ea7dd224765}">
+        <p14:section name="B2B" id="{69ef8ba1-879c-496a-d161-5802632e952e}">
           <p14:sldIdLst>
             <p14:sldId id="263"/>
           </p14:sldIdLst>
         </p14:section>
-        <p14:section name="로드맵" id="{a037dcc0-37f9-25ab-c043-dad051c2db28}">
+        <p14:section name="로드맵" id="{98fb1699-a65d-4b50-30f8-451182296fd5}">
           <p14:sldIdLst>
             <p14:sldId id="264"/>
           </p14:sldIdLst>
         </p14:section>
-        <p14:section name="연락처" id="{6db07832-57bd-c7c1-34eb-a5779f89cd22}">
+        <p14:section name="연락처" id="{76b9ac39-ac16-dfe6-28db-2d86d4154865}">
           <p14:sldIdLst>
             <p14:sldId id="265"/>
           </p14:sldIdLst>
@@ -9280,12 +9280,12 @@
         </p:nvSpPr>
         <p:spPr>
           <a:xfrm>
-            <a:off x="457200" y="3703320"/>
-            <a:ext cx="8229600" cy="640080"/>
+            <a:off x="457200" y="3611880"/>
+            <a:ext cx="8229600" cy="548640"/>
           </a:xfrm>
           <a:prstGeom prst="roundRect">
             <a:avLst>
-              <a:gd name="adj" fmla="val 11429"/>
+              <a:gd name="adj" fmla="val 13333"/>
             </a:avLst>
           </a:prstGeom>
           <a:solidFill>
@@ -9307,8 +9307,47 @@
         </p:nvSpPr>
         <p:spPr>
           <a:xfrm>
-            <a:off x="731520" y="3703320"/>
-            <a:ext cx="7680960" cy="640080"/>
+            <a:off x="457200" y="4315968"/>
+            <a:ext cx="8229600" cy="228600"/>
+          </a:xfrm>
+          <a:prstGeom prst="rect">
+            <a:avLst/>
+          </a:prstGeom>
+          <a:noFill/>
+          <a:ln/>
+        </p:spPr>
+        <p:txBody>
+          <a:bodyPr wrap="square" lIns="0" tIns="0" rIns="0" bIns="0" rtlCol="0" anchor="t"/>
+          <a:lstStyle/>
+          <a:p>
+            <a:pPr indent="0" marL="0">
+              <a:buNone/>
+            </a:pPr>
+            <a:r>
+              <a:rPr lang="en-US" sz="1100" dirty="0">
+                <a:solidFill>
+                  <a:schemeClr val="accent3"/>
+                </a:solidFill>
+                <a:latin typeface="Malgun Gothic" pitchFamily="34" charset="0"/>
+                <a:ea typeface="Malgun Gothic" pitchFamily="34" charset="-122"/>
+                <a:cs typeface="Malgun Gothic" pitchFamily="34" charset="-120"/>
+              </a:rPr>
+              <a:t>2026.11  ㈜라라슈 법인 설립 예정</a:t>
+            </a:r>
+            <a:endParaRPr lang="en-US" sz="1100" dirty="0"/>
+          </a:p>
+        </p:txBody>
+      </p:sp>
+      <p:sp>
+        <p:nvSpPr>
+          <p:cNvPr id="27" name="Text 24"/>
+          <p:cNvSpPr txBox="1"/>
+          <p:nvPr/>
+        </p:nvSpPr>
+        <p:spPr>
+          <a:xfrm>
+            <a:off x="731520" y="3611880"/>
+            <a:ext cx="7680960" cy="548640"/>
           </a:xfrm>
           <a:prstGeom prst="rect">
             <a:avLst/>
